--- a/Гистограмма, профили и проекции/Практическая работа № 2.pptx
+++ b/Гистограмма, профили и проекции/Практическая работа № 2.pptx
@@ -5,7 +5,7 @@
     <p:sldMasterId id="2147483660" r:id="rId1"/>
   </p:sldMasterIdLst>
   <p:notesMasterIdLst>
-    <p:notesMasterId r:id="rId17"/>
+    <p:notesMasterId r:id="rId18"/>
   </p:notesMasterIdLst>
   <p:sldIdLst>
     <p:sldId id="256" r:id="rId2"/>
@@ -20,9 +20,10 @@
     <p:sldId id="266" r:id="rId11"/>
     <p:sldId id="267" r:id="rId12"/>
     <p:sldId id="268" r:id="rId13"/>
-    <p:sldId id="269" r:id="rId14"/>
-    <p:sldId id="270" r:id="rId15"/>
-    <p:sldId id="271" r:id="rId16"/>
+    <p:sldId id="272" r:id="rId14"/>
+    <p:sldId id="269" r:id="rId15"/>
+    <p:sldId id="270" r:id="rId16"/>
+    <p:sldId id="271" r:id="rId17"/>
   </p:sldIdLst>
   <p:sldSz cx="12192000" cy="6858000"/>
   <p:notesSz cx="6858000" cy="9144000"/>
@@ -9869,6 +9870,36 @@
           </a:p>
         </p:txBody>
       </p:sp>
+      <p:pic>
+        <p:nvPicPr>
+          <p:cNvPr id="4" name="Рисунок 3">
+            <a:extLst>
+              <a:ext uri="{FF2B5EF4-FFF2-40B4-BE49-F238E27FC236}">
+                <a16:creationId xmlns:a16="http://schemas.microsoft.com/office/drawing/2014/main" id="{1BC384F5-6530-5034-7554-7B4070FDB1CD}"/>
+              </a:ext>
+            </a:extLst>
+          </p:cNvPr>
+          <p:cNvPicPr>
+            <a:picLocks noChangeAspect="1"/>
+          </p:cNvPicPr>
+          <p:nvPr/>
+        </p:nvPicPr>
+        <p:blipFill>
+          <a:blip r:embed="rId4"/>
+          <a:stretch>
+            <a:fillRect/>
+          </a:stretch>
+        </p:blipFill>
+        <p:spPr>
+          <a:xfrm>
+            <a:off x="5059146" y="3242730"/>
+            <a:ext cx="5787030" cy="3144398"/>
+          </a:xfrm>
+          <a:prstGeom prst="rect">
+            <a:avLst/>
+          </a:prstGeom>
+        </p:spPr>
+      </p:pic>
     </p:spTree>
     <p:extLst>
       <p:ext uri="{BB962C8B-B14F-4D97-AF65-F5344CB8AC3E}">
@@ -9935,12 +9966,41 @@
           </a:p>
         </p:txBody>
       </p:sp>
+      <p:sp>
+        <p:nvSpPr>
+          <p:cNvPr id="11" name="Номер слайда 10">
+            <a:extLst>
+              <a:ext uri="{FF2B5EF4-FFF2-40B4-BE49-F238E27FC236}">
+                <a16:creationId xmlns:a16="http://schemas.microsoft.com/office/drawing/2014/main" id="{9C3925F8-27F0-6489-A7CE-CBC87DC92770}"/>
+              </a:ext>
+            </a:extLst>
+          </p:cNvPr>
+          <p:cNvSpPr>
+            <a:spLocks noGrp="1"/>
+          </p:cNvSpPr>
+          <p:nvPr>
+            <p:ph type="sldNum" sz="quarter" idx="12"/>
+          </p:nvPr>
+        </p:nvSpPr>
+        <p:spPr/>
+        <p:txBody>
+          <a:bodyPr/>
+          <a:lstStyle/>
+          <a:p>
+            <a:fld id="{E294C9D9-2DEA-415A-A3DF-2372EDC3FB1F}" type="slidenum">
+              <a:rPr lang="ru-RU" smtClean="0"/>
+              <a:t>12</a:t>
+            </a:fld>
+            <a:endParaRPr lang="ru-RU"/>
+          </a:p>
+        </p:txBody>
+      </p:sp>
       <p:pic>
         <p:nvPicPr>
-          <p:cNvPr id="5" name="Рисунок 4">
-            <a:extLst>
-              <a:ext uri="{FF2B5EF4-FFF2-40B4-BE49-F238E27FC236}">
-                <a16:creationId xmlns:a16="http://schemas.microsoft.com/office/drawing/2014/main" id="{CA7444B8-592F-9533-8E2C-DC7E5182383B}"/>
+          <p:cNvPr id="10" name="Рисунок 9">
+            <a:extLst>
+              <a:ext uri="{FF2B5EF4-FFF2-40B4-BE49-F238E27FC236}">
+                <a16:creationId xmlns:a16="http://schemas.microsoft.com/office/drawing/2014/main" id="{13E7C820-E6FF-A028-1A6A-C6012455CC74}"/>
               </a:ext>
             </a:extLst>
           </p:cNvPr>
@@ -9957,98 +10017,8 @@
         </p:blipFill>
         <p:spPr>
           <a:xfrm>
-            <a:off x="307276" y="1292828"/>
-            <a:ext cx="3909158" cy="2136172"/>
-          </a:xfrm>
-          <a:prstGeom prst="rect">
-            <a:avLst/>
-          </a:prstGeom>
-        </p:spPr>
-      </p:pic>
-      <p:pic>
-        <p:nvPicPr>
-          <p:cNvPr id="7" name="Рисунок 6">
-            <a:extLst>
-              <a:ext uri="{FF2B5EF4-FFF2-40B4-BE49-F238E27FC236}">
-                <a16:creationId xmlns:a16="http://schemas.microsoft.com/office/drawing/2014/main" id="{6E175AB3-8B4A-26A8-5359-B93DF2B414E6}"/>
-              </a:ext>
-            </a:extLst>
-          </p:cNvPr>
-          <p:cNvPicPr>
-            <a:picLocks noChangeAspect="1"/>
-          </p:cNvPicPr>
-          <p:nvPr/>
-        </p:nvPicPr>
-        <p:blipFill>
-          <a:blip r:embed="rId3"/>
-          <a:srcRect r="551" b="36671"/>
-          <a:stretch>
-            <a:fillRect/>
-          </a:stretch>
-        </p:blipFill>
-        <p:spPr>
-          <a:xfrm>
-            <a:off x="307276" y="3614665"/>
-            <a:ext cx="3909158" cy="2118187"/>
-          </a:xfrm>
-          <a:prstGeom prst="rect">
-            <a:avLst/>
-          </a:prstGeom>
-        </p:spPr>
-      </p:pic>
-      <p:sp>
-        <p:nvSpPr>
-          <p:cNvPr id="11" name="Номер слайда 10">
-            <a:extLst>
-              <a:ext uri="{FF2B5EF4-FFF2-40B4-BE49-F238E27FC236}">
-                <a16:creationId xmlns:a16="http://schemas.microsoft.com/office/drawing/2014/main" id="{9C3925F8-27F0-6489-A7CE-CBC87DC92770}"/>
-              </a:ext>
-            </a:extLst>
-          </p:cNvPr>
-          <p:cNvSpPr>
-            <a:spLocks noGrp="1"/>
-          </p:cNvSpPr>
-          <p:nvPr>
-            <p:ph type="sldNum" sz="quarter" idx="12"/>
-          </p:nvPr>
-        </p:nvSpPr>
-        <p:spPr/>
-        <p:txBody>
-          <a:bodyPr/>
-          <a:lstStyle/>
-          <a:p>
-            <a:fld id="{E294C9D9-2DEA-415A-A3DF-2372EDC3FB1F}" type="slidenum">
-              <a:rPr lang="ru-RU" smtClean="0"/>
-              <a:t>12</a:t>
-            </a:fld>
-            <a:endParaRPr lang="ru-RU"/>
-          </a:p>
-        </p:txBody>
-      </p:sp>
-      <p:pic>
-        <p:nvPicPr>
-          <p:cNvPr id="13" name="Рисунок 12">
-            <a:extLst>
-              <a:ext uri="{FF2B5EF4-FFF2-40B4-BE49-F238E27FC236}">
-                <a16:creationId xmlns:a16="http://schemas.microsoft.com/office/drawing/2014/main" id="{47D8751F-86E1-932B-B625-999B51220D39}"/>
-              </a:ext>
-            </a:extLst>
-          </p:cNvPr>
-          <p:cNvPicPr>
-            <a:picLocks noChangeAspect="1"/>
-          </p:cNvPicPr>
-          <p:nvPr/>
-        </p:nvPicPr>
-        <p:blipFill>
-          <a:blip r:embed="rId4"/>
-          <a:stretch>
-            <a:fillRect/>
-          </a:stretch>
-        </p:blipFill>
-        <p:spPr>
-          <a:xfrm>
-            <a:off x="4276343" y="2114551"/>
-            <a:ext cx="7915657" cy="3018238"/>
+            <a:off x="138486" y="1112189"/>
+            <a:ext cx="11915028" cy="4633622"/>
           </a:xfrm>
           <a:prstGeom prst="rect">
             <a:avLst/>
@@ -10076,6 +10046,131 @@
         <p:cNvPr id="1" name="">
           <a:extLst>
             <a:ext uri="{FF2B5EF4-FFF2-40B4-BE49-F238E27FC236}">
+              <a16:creationId xmlns:a16="http://schemas.microsoft.com/office/drawing/2014/main" id="{311CA2C8-70D9-4825-D487-BCDAB376227E}"/>
+            </a:ext>
+          </a:extLst>
+        </p:cNvPr>
+        <p:cNvGrpSpPr/>
+        <p:nvPr/>
+      </p:nvGrpSpPr>
+      <p:grpSpPr>
+        <a:xfrm>
+          <a:off x="0" y="0"/>
+          <a:ext cx="0" cy="0"/>
+          <a:chOff x="0" y="0"/>
+          <a:chExt cx="0" cy="0"/>
+        </a:xfrm>
+      </p:grpSpPr>
+      <p:sp>
+        <p:nvSpPr>
+          <p:cNvPr id="2" name="Заголовок 1">
+            <a:extLst>
+              <a:ext uri="{FF2B5EF4-FFF2-40B4-BE49-F238E27FC236}">
+                <a16:creationId xmlns:a16="http://schemas.microsoft.com/office/drawing/2014/main" id="{699369BC-5552-3FA0-8D78-2D66681478AC}"/>
+              </a:ext>
+            </a:extLst>
+          </p:cNvPr>
+          <p:cNvSpPr>
+            <a:spLocks noGrp="1"/>
+          </p:cNvSpPr>
+          <p:nvPr>
+            <p:ph type="title"/>
+          </p:nvPr>
+        </p:nvSpPr>
+        <p:spPr/>
+        <p:txBody>
+          <a:bodyPr>
+            <a:noAutofit/>
+          </a:bodyPr>
+          <a:lstStyle/>
+          <a:p>
+            <a:r>
+              <a:rPr lang="ru-RU" sz="3200" dirty="0"/>
+              <a:t>Задание 5. Построить горизонтальные и вертикальные проекции бинарного изображения и найти границы объектов</a:t>
+            </a:r>
+          </a:p>
+        </p:txBody>
+      </p:sp>
+      <p:sp>
+        <p:nvSpPr>
+          <p:cNvPr id="11" name="Номер слайда 10">
+            <a:extLst>
+              <a:ext uri="{FF2B5EF4-FFF2-40B4-BE49-F238E27FC236}">
+                <a16:creationId xmlns:a16="http://schemas.microsoft.com/office/drawing/2014/main" id="{B8D3056E-0A96-D615-3F9E-81922536ED34}"/>
+              </a:ext>
+            </a:extLst>
+          </p:cNvPr>
+          <p:cNvSpPr>
+            <a:spLocks noGrp="1"/>
+          </p:cNvSpPr>
+          <p:nvPr>
+            <p:ph type="sldNum" sz="quarter" idx="12"/>
+          </p:nvPr>
+        </p:nvSpPr>
+        <p:spPr/>
+        <p:txBody>
+          <a:bodyPr/>
+          <a:lstStyle/>
+          <a:p>
+            <a:fld id="{E294C9D9-2DEA-415A-A3DF-2372EDC3FB1F}" type="slidenum">
+              <a:rPr lang="ru-RU" smtClean="0"/>
+              <a:t>13</a:t>
+            </a:fld>
+            <a:endParaRPr lang="ru-RU"/>
+          </a:p>
+        </p:txBody>
+      </p:sp>
+      <p:pic>
+        <p:nvPicPr>
+          <p:cNvPr id="5" name="Рисунок 4">
+            <a:extLst>
+              <a:ext uri="{FF2B5EF4-FFF2-40B4-BE49-F238E27FC236}">
+                <a16:creationId xmlns:a16="http://schemas.microsoft.com/office/drawing/2014/main" id="{FA7AEDE0-F89C-028C-D388-B4BA58013B64}"/>
+              </a:ext>
+            </a:extLst>
+          </p:cNvPr>
+          <p:cNvPicPr>
+            <a:picLocks noChangeAspect="1"/>
+          </p:cNvPicPr>
+          <p:nvPr/>
+        </p:nvPicPr>
+        <p:blipFill>
+          <a:blip r:embed="rId2"/>
+          <a:stretch>
+            <a:fillRect/>
+          </a:stretch>
+        </p:blipFill>
+        <p:spPr>
+          <a:xfrm>
+            <a:off x="104775" y="1095375"/>
+            <a:ext cx="11982450" cy="4667250"/>
+          </a:xfrm>
+          <a:prstGeom prst="rect">
+            <a:avLst/>
+          </a:prstGeom>
+        </p:spPr>
+      </p:pic>
+    </p:spTree>
+    <p:extLst>
+      <p:ext uri="{BB962C8B-B14F-4D97-AF65-F5344CB8AC3E}">
+        <p14:creationId xmlns:p14="http://schemas.microsoft.com/office/powerpoint/2010/main" val="92598226"/>
+      </p:ext>
+    </p:extLst>
+  </p:cSld>
+  <p:clrMapOvr>
+    <a:masterClrMapping/>
+  </p:clrMapOvr>
+</p:sld>
+</file>
+
+<file path=ppt/slides/slide14.xml><?xml version="1.0" encoding="utf-8"?>
+<p:sld xmlns:a="http://schemas.openxmlformats.org/drawingml/2006/main" xmlns:r="http://schemas.openxmlformats.org/officeDocument/2006/relationships" xmlns:p="http://schemas.openxmlformats.org/presentationml/2006/main">
+  <p:cSld>
+    <p:spTree>
+      <p:nvGrpSpPr>
+        <p:cNvPr id="1" name="">
+          <a:extLst>
+            <a:ext uri="{FF2B5EF4-FFF2-40B4-BE49-F238E27FC236}">
               <a16:creationId xmlns:a16="http://schemas.microsoft.com/office/drawing/2014/main" id="{650A15F3-6435-8E6E-C9BE-42C54A2EC10F}"/>
             </a:ext>
           </a:extLst>
@@ -10174,7 +10269,7 @@
           <a:p>
             <a:fld id="{E294C9D9-2DEA-415A-A3DF-2372EDC3FB1F}" type="slidenum">
               <a:rPr lang="ru-RU" smtClean="0"/>
-              <a:t>13</a:t>
+              <a:t>14</a:t>
             </a:fld>
             <a:endParaRPr lang="ru-RU"/>
           </a:p>
@@ -10223,7 +10318,7 @@
 </p:sld>
 </file>
 
-<file path=ppt/slides/slide14.xml><?xml version="1.0" encoding="utf-8"?>
+<file path=ppt/slides/slide15.xml><?xml version="1.0" encoding="utf-8"?>
 <p:sld xmlns:a="http://schemas.openxmlformats.org/drawingml/2006/main" xmlns:r="http://schemas.openxmlformats.org/officeDocument/2006/relationships" xmlns:p="http://schemas.openxmlformats.org/presentationml/2006/main">
   <p:cSld>
     <p:spTree>
@@ -10406,7 +10501,7 @@
           <a:p>
             <a:fld id="{E294C9D9-2DEA-415A-A3DF-2372EDC3FB1F}" type="slidenum">
               <a:rPr lang="ru-RU" smtClean="0"/>
-              <a:t>14</a:t>
+              <a:t>15</a:t>
             </a:fld>
             <a:endParaRPr lang="ru-RU"/>
           </a:p>
@@ -10425,7 +10520,7 @@
 </p:sld>
 </file>
 
-<file path=ppt/slides/slide15.xml><?xml version="1.0" encoding="utf-8"?>
+<file path=ppt/slides/slide16.xml><?xml version="1.0" encoding="utf-8"?>
 <p:sld xmlns:a="http://schemas.openxmlformats.org/drawingml/2006/main" xmlns:r="http://schemas.openxmlformats.org/officeDocument/2006/relationships" xmlns:p="http://schemas.openxmlformats.org/presentationml/2006/main">
   <p:cSld>
     <p:spTree>
@@ -10632,7 +10727,7 @@
           <a:p>
             <a:fld id="{E294C9D9-2DEA-415A-A3DF-2372EDC3FB1F}" type="slidenum">
               <a:rPr lang="ru-RU" smtClean="0"/>
-              <a:t>15</a:t>
+              <a:t>16</a:t>
             </a:fld>
             <a:endParaRPr lang="ru-RU"/>
           </a:p>
@@ -11235,7 +11330,7 @@
         </p:blipFill>
         <p:spPr>
           <a:xfrm>
-            <a:off x="283477" y="5081877"/>
+            <a:off x="283477" y="4960288"/>
             <a:ext cx="4066057" cy="1341465"/>
           </a:xfrm>
           <a:prstGeom prst="rect">

--- a/Гистограмма, профили и проекции/Практическая работа № 2.pptx
+++ b/Гистограмма, профили и проекции/Практическая работа № 2.pptx
@@ -5,7 +5,7 @@
     <p:sldMasterId id="2147483660" r:id="rId1"/>
   </p:sldMasterIdLst>
   <p:notesMasterIdLst>
-    <p:notesMasterId r:id="rId18"/>
+    <p:notesMasterId r:id="rId21"/>
   </p:notesMasterIdLst>
   <p:sldIdLst>
     <p:sldId id="256" r:id="rId2"/>
@@ -14,16 +14,19 @@
     <p:sldId id="259" r:id="rId5"/>
     <p:sldId id="260" r:id="rId6"/>
     <p:sldId id="261" r:id="rId7"/>
-    <p:sldId id="263" r:id="rId8"/>
-    <p:sldId id="264" r:id="rId9"/>
-    <p:sldId id="265" r:id="rId10"/>
-    <p:sldId id="266" r:id="rId11"/>
-    <p:sldId id="267" r:id="rId12"/>
-    <p:sldId id="268" r:id="rId13"/>
-    <p:sldId id="272" r:id="rId14"/>
-    <p:sldId id="269" r:id="rId15"/>
-    <p:sldId id="270" r:id="rId16"/>
-    <p:sldId id="271" r:id="rId17"/>
+    <p:sldId id="273" r:id="rId8"/>
+    <p:sldId id="274" r:id="rId9"/>
+    <p:sldId id="275" r:id="rId10"/>
+    <p:sldId id="263" r:id="rId11"/>
+    <p:sldId id="264" r:id="rId12"/>
+    <p:sldId id="265" r:id="rId13"/>
+    <p:sldId id="266" r:id="rId14"/>
+    <p:sldId id="267" r:id="rId15"/>
+    <p:sldId id="268" r:id="rId16"/>
+    <p:sldId id="272" r:id="rId17"/>
+    <p:sldId id="269" r:id="rId18"/>
+    <p:sldId id="270" r:id="rId19"/>
+    <p:sldId id="271" r:id="rId20"/>
   </p:sldIdLst>
   <p:sldSz cx="12192000" cy="6858000"/>
   <p:notesSz cx="6858000" cy="9144000"/>
@@ -212,7 +215,7 @@
           <a:p>
             <a:fld id="{1C5298AC-F66D-4F02-9A34-4BF5A858A91F}" type="datetimeFigureOut">
               <a:rPr lang="ru-RU" smtClean="0"/>
-              <a:t>08.10.2026</a:t>
+              <a:t>15.10.2026</a:t>
             </a:fld>
             <a:endParaRPr lang="ru-RU"/>
           </a:p>
@@ -895,7 +898,7 @@
           <a:p>
             <a:fld id="{9EC08F63-68FD-44F9-A52E-105615C8C7C5}" type="datetime1">
               <a:rPr lang="ru-RU" smtClean="0"/>
-              <a:t>08.10.2026</a:t>
+              <a:t>15.10.2026</a:t>
             </a:fld>
             <a:endParaRPr lang="ru-RU"/>
           </a:p>
@@ -1292,7 +1295,7 @@
           <a:p>
             <a:fld id="{60F6139E-B88E-4434-A7F1-B43174DC65B6}" type="datetime1">
               <a:rPr lang="ru-RU" smtClean="0"/>
-              <a:t>08.10.2026</a:t>
+              <a:t>15.10.2026</a:t>
             </a:fld>
             <a:endParaRPr lang="ru-RU"/>
           </a:p>
@@ -1725,7 +1728,7 @@
           <a:p>
             <a:fld id="{74670348-D143-436F-9129-EED979619D28}" type="datetime1">
               <a:rPr lang="ru-RU" smtClean="0"/>
-              <a:t>08.10.2026</a:t>
+              <a:t>15.10.2026</a:t>
             </a:fld>
             <a:endParaRPr lang="ru-RU"/>
           </a:p>
@@ -1958,7 +1961,7 @@
           <a:p>
             <a:fld id="{0BF40F54-ED29-4155-B487-1AE9DC91D7FE}" type="datetime1">
               <a:rPr lang="ru-RU" smtClean="0"/>
-              <a:t>08.10.2026</a:t>
+              <a:t>15.10.2026</a:t>
             </a:fld>
             <a:endParaRPr lang="ru-RU"/>
           </a:p>
@@ -2392,7 +2395,7 @@
           <a:p>
             <a:fld id="{4A6BD9A3-5529-4EFB-87FC-DF25E53CA87E}" type="datetime1">
               <a:rPr lang="ru-RU" smtClean="0"/>
-              <a:t>08.10.2026</a:t>
+              <a:t>15.10.2026</a:t>
             </a:fld>
             <a:endParaRPr lang="ru-RU"/>
           </a:p>
@@ -2911,7 +2914,7 @@
           <a:p>
             <a:fld id="{B1EAD283-6F5C-4FE7-96A5-7DA948460113}" type="datetime1">
               <a:rPr lang="ru-RU" smtClean="0"/>
-              <a:t>08.10.2026</a:t>
+              <a:t>15.10.2026</a:t>
             </a:fld>
             <a:endParaRPr lang="ru-RU"/>
           </a:p>
@@ -3287,7 +3290,7 @@
           <a:p>
             <a:fld id="{DDA65EB6-0C0C-4723-87DB-EADF164F8E5B}" type="datetime1">
               <a:rPr lang="ru-RU" smtClean="0"/>
-              <a:t>08.10.2026</a:t>
+              <a:t>15.10.2026</a:t>
             </a:fld>
             <a:endParaRPr lang="ru-RU"/>
           </a:p>
@@ -3534,7 +3537,7 @@
           <a:p>
             <a:fld id="{F2CEB32D-B953-42BB-A23C-01EA4E11BFF7}" type="datetime1">
               <a:rPr lang="ru-RU" smtClean="0"/>
-              <a:t>08.10.2026</a:t>
+              <a:t>15.10.2026</a:t>
             </a:fld>
             <a:endParaRPr lang="ru-RU"/>
           </a:p>
@@ -3936,7 +3939,7 @@
           <a:p>
             <a:fld id="{2B12F209-C4FA-40C7-B9A5-2CBFF18E338A}" type="datetime1">
               <a:rPr lang="ru-RU" smtClean="0"/>
-              <a:t>08.10.2026</a:t>
+              <a:t>15.10.2026</a:t>
             </a:fld>
             <a:endParaRPr lang="ru-RU"/>
           </a:p>
@@ -4461,7 +4464,7 @@
           <a:p>
             <a:fld id="{3CB83988-88B5-4B4B-8004-AD74D8DCA8B3}" type="datetime1">
               <a:rPr lang="ru-RU" smtClean="0"/>
-              <a:t>08.10.2026</a:t>
+              <a:t>15.10.2026</a:t>
             </a:fld>
             <a:endParaRPr lang="ru-RU"/>
           </a:p>
@@ -4755,7 +4758,7 @@
           <a:p>
             <a:fld id="{F298FEDD-BD0E-44D0-8A43-43D2423273A1}" type="datetime1">
               <a:rPr lang="ru-RU" smtClean="0"/>
-              <a:t>08.10.2026</a:t>
+              <a:t>15.10.2026</a:t>
             </a:fld>
             <a:endParaRPr lang="ru-RU"/>
           </a:p>
@@ -4955,7 +4958,7 @@
           <a:p>
             <a:fld id="{8DED1C2B-1434-41FF-A42D-A6C0AEFEF163}" type="datetime1">
               <a:rPr lang="ru-RU" smtClean="0"/>
-              <a:t>08.10.2026</a:t>
+              <a:t>15.10.2026</a:t>
             </a:fld>
             <a:endParaRPr lang="ru-RU"/>
           </a:p>
@@ -5202,7 +5205,7 @@
           <a:p>
             <a:fld id="{5E04A568-6778-4326-8F60-A8331F338313}" type="datetime1">
               <a:rPr lang="ru-RU" smtClean="0"/>
-              <a:t>08.10.2026</a:t>
+              <a:t>15.10.2026</a:t>
             </a:fld>
             <a:endParaRPr lang="ru-RU"/>
           </a:p>
@@ -5409,7 +5412,7 @@
           <a:p>
             <a:fld id="{94CB9AFD-B43D-4A4E-A9CC-7CDD69DA6899}" type="datetime1">
               <a:rPr lang="ru-RU" smtClean="0"/>
-              <a:t>08.10.2026</a:t>
+              <a:t>15.10.2026</a:t>
             </a:fld>
             <a:endParaRPr lang="ru-RU"/>
           </a:p>
@@ -5682,7 +5685,7 @@
           <a:p>
             <a:fld id="{9AAA61A5-2D62-4D26-A7C0-AD45D16A75BB}" type="datetime1">
               <a:rPr lang="ru-RU" smtClean="0"/>
-              <a:t>08.10.2026</a:t>
+              <a:t>15.10.2026</a:t>
             </a:fld>
             <a:endParaRPr lang="ru-RU"/>
           </a:p>
@@ -6107,7 +6110,7 @@
           <a:p>
             <a:fld id="{0FBDD8A3-B7B6-45A0-9AB1-D949B0E67CE8}" type="datetime1">
               <a:rPr lang="ru-RU" smtClean="0"/>
-              <a:t>08.10.2026</a:t>
+              <a:t>15.10.2026</a:t>
             </a:fld>
             <a:endParaRPr lang="ru-RU"/>
           </a:p>
@@ -6249,7 +6252,7 @@
           <a:p>
             <a:fld id="{9182F61C-F6E6-4155-9694-A3D31334F45B}" type="datetime1">
               <a:rPr lang="ru-RU" smtClean="0"/>
-              <a:t>08.10.2026</a:t>
+              <a:t>15.10.2026</a:t>
             </a:fld>
             <a:endParaRPr lang="ru-RU"/>
           </a:p>
@@ -6337,7 +6340,7 @@
           <a:p>
             <a:fld id="{63192F0B-BD47-4551-8555-95C7C7A64F41}" type="datetime1">
               <a:rPr lang="ru-RU" smtClean="0"/>
-              <a:t>08.10.2026</a:t>
+              <a:t>15.10.2026</a:t>
             </a:fld>
             <a:endParaRPr lang="ru-RU"/>
           </a:p>
@@ -6601,7 +6604,7 @@
           <a:p>
             <a:fld id="{6D6B9F61-8169-4783-B8C4-4A18C4026503}" type="datetime1">
               <a:rPr lang="ru-RU" smtClean="0"/>
-              <a:t>08.10.2026</a:t>
+              <a:t>15.10.2026</a:t>
             </a:fld>
             <a:endParaRPr lang="ru-RU"/>
           </a:p>
@@ -6845,7 +6848,7 @@
           <a:p>
             <a:fld id="{1F91BE9E-5F37-42CD-AF01-61AA02B5BBED}" type="datetime1">
               <a:rPr lang="ru-RU" smtClean="0"/>
-              <a:t>08.10.2026</a:t>
+              <a:t>15.10.2026</a:t>
             </a:fld>
             <a:endParaRPr lang="ru-RU"/>
           </a:p>
@@ -7224,7 +7227,7 @@
           <a:p>
             <a:fld id="{370F9359-BB8B-45FD-8B86-138FF0155BE1}" type="datetime1">
               <a:rPr lang="ru-RU" smtClean="0"/>
-              <a:t>08.10.2026</a:t>
+              <a:t>15.10.2026</a:t>
             </a:fld>
             <a:endParaRPr lang="ru-RU"/>
           </a:p>
@@ -7492,7 +7495,7 @@
           <a:p>
             <a:fld id="{5744E98A-C6CB-4740-94CF-7B79157857DC}" type="datetime1">
               <a:rPr lang="ru-RU" smtClean="0"/>
-              <a:t>08.10.2026</a:t>
+              <a:t>15.10.2026</a:t>
             </a:fld>
             <a:endParaRPr lang="ru-RU"/>
           </a:p>
@@ -7691,7 +7694,7 @@
           <a:p>
             <a:fld id="{8F314C3C-5380-447C-8C4A-80885D6C1B2B}" type="datetime1">
               <a:rPr lang="ru-RU" smtClean="0"/>
-              <a:t>08.10.2026</a:t>
+              <a:t>15.10.2026</a:t>
             </a:fld>
             <a:endParaRPr lang="ru-RU"/>
           </a:p>
@@ -7953,7 +7956,7 @@
           <a:p>
             <a:fld id="{0F0B1818-EA50-4E6B-B1F5-269F22071F39}" type="datetime1">
               <a:rPr lang="ru-RU" smtClean="0"/>
-              <a:t>08.10.2026</a:t>
+              <a:t>15.10.2026</a:t>
             </a:fld>
             <a:endParaRPr lang="ru-RU"/>
           </a:p>
@@ -8349,7 +8352,7 @@
           <a:p>
             <a:fld id="{E9E84084-15D7-4F36-859F-F56C53A6F4E5}" type="datetime1">
               <a:rPr lang="ru-RU" smtClean="0"/>
-              <a:t>08.10.2026</a:t>
+              <a:t>15.10.2026</a:t>
             </a:fld>
             <a:endParaRPr lang="ru-RU"/>
           </a:p>
@@ -8583,7 +8586,7 @@
           <a:p>
             <a:fld id="{D4255E2A-8982-450C-A923-417B0C2E922F}" type="datetime1">
               <a:rPr lang="ru-RU" smtClean="0"/>
-              <a:t>08.10.2026</a:t>
+              <a:t>15.10.2026</a:t>
             </a:fld>
             <a:endParaRPr lang="ru-RU"/>
           </a:p>
@@ -8817,7 +8820,7 @@
           <a:p>
             <a:fld id="{CDCAFA87-D25E-497C-A210-941991E7D2A4}" type="datetime1">
               <a:rPr lang="ru-RU" smtClean="0"/>
-              <a:t>08.10.2026</a:t>
+              <a:t>15.10.2026</a:t>
             </a:fld>
             <a:endParaRPr lang="ru-RU"/>
           </a:p>
@@ -9074,7 +9077,7 @@
           <a:p>
             <a:fld id="{6A14468A-DEFC-459E-8886-652A759B4AEF}" type="datetime1">
               <a:rPr lang="ru-RU" smtClean="0"/>
-              <a:t>08.10.2026</a:t>
+              <a:t>15.10.2026</a:t>
             </a:fld>
             <a:endParaRPr lang="ru-RU"/>
           </a:p>
@@ -9614,6 +9617,401 @@
   <p:cSld>
     <p:spTree>
       <p:nvGrpSpPr>
+        <p:cNvPr id="1" name=""/>
+        <p:cNvGrpSpPr/>
+        <p:nvPr/>
+      </p:nvGrpSpPr>
+      <p:grpSpPr>
+        <a:xfrm>
+          <a:off x="0" y="0"/>
+          <a:ext cx="0" cy="0"/>
+          <a:chOff x="0" y="0"/>
+          <a:chExt cx="0" cy="0"/>
+        </a:xfrm>
+      </p:grpSpPr>
+      <p:sp>
+        <p:nvSpPr>
+          <p:cNvPr id="2" name="Заголовок 1">
+            <a:extLst>
+              <a:ext uri="{FF2B5EF4-FFF2-40B4-BE49-F238E27FC236}">
+                <a16:creationId xmlns:a16="http://schemas.microsoft.com/office/drawing/2014/main" id="{A0970074-39AE-C233-F2A7-9E7323F343C8}"/>
+              </a:ext>
+            </a:extLst>
+          </p:cNvPr>
+          <p:cNvSpPr>
+            <a:spLocks noGrp="1"/>
+          </p:cNvSpPr>
+          <p:nvPr>
+            <p:ph type="title"/>
+          </p:nvPr>
+        </p:nvSpPr>
+        <p:spPr/>
+        <p:txBody>
+          <a:bodyPr>
+            <a:noAutofit/>
+          </a:bodyPr>
+          <a:lstStyle/>
+          <a:p>
+            <a:r>
+              <a:rPr lang="ru-RU" sz="3200" dirty="0"/>
+              <a:t>Задание 3. Построить горизонтальный профиль изображения и определить линию с минимальной яркостью.</a:t>
+            </a:r>
+          </a:p>
+        </p:txBody>
+      </p:sp>
+      <p:pic>
+        <p:nvPicPr>
+          <p:cNvPr id="5" name="Объект 4">
+            <a:extLst>
+              <a:ext uri="{FF2B5EF4-FFF2-40B4-BE49-F238E27FC236}">
+                <a16:creationId xmlns:a16="http://schemas.microsoft.com/office/drawing/2014/main" id="{37FCD15C-84FF-0773-18A9-5D5D20A4FD43}"/>
+              </a:ext>
+            </a:extLst>
+          </p:cNvPr>
+          <p:cNvPicPr>
+            <a:picLocks noGrp="1" noChangeAspect="1"/>
+          </p:cNvPicPr>
+          <p:nvPr>
+            <p:ph idx="1"/>
+          </p:nvPr>
+        </p:nvPicPr>
+        <p:blipFill>
+          <a:blip r:embed="rId2"/>
+          <a:stretch>
+            <a:fillRect/>
+          </a:stretch>
+        </p:blipFill>
+        <p:spPr>
+          <a:xfrm>
+            <a:off x="684987" y="1785980"/>
+            <a:ext cx="10822025" cy="3286040"/>
+          </a:xfrm>
+          <a:prstGeom prst="rect">
+            <a:avLst/>
+          </a:prstGeom>
+        </p:spPr>
+      </p:pic>
+      <p:sp>
+        <p:nvSpPr>
+          <p:cNvPr id="11" name="Номер слайда 10">
+            <a:extLst>
+              <a:ext uri="{FF2B5EF4-FFF2-40B4-BE49-F238E27FC236}">
+                <a16:creationId xmlns:a16="http://schemas.microsoft.com/office/drawing/2014/main" id="{54E197D6-2512-A5B0-592D-84C6614DC2C4}"/>
+              </a:ext>
+            </a:extLst>
+          </p:cNvPr>
+          <p:cNvSpPr>
+            <a:spLocks noGrp="1"/>
+          </p:cNvSpPr>
+          <p:nvPr>
+            <p:ph type="sldNum" sz="quarter" idx="12"/>
+          </p:nvPr>
+        </p:nvSpPr>
+        <p:spPr/>
+        <p:txBody>
+          <a:bodyPr/>
+          <a:lstStyle/>
+          <a:p>
+            <a:fld id="{E294C9D9-2DEA-415A-A3DF-2372EDC3FB1F}" type="slidenum">
+              <a:rPr lang="ru-RU" smtClean="0"/>
+              <a:t>10</a:t>
+            </a:fld>
+            <a:endParaRPr lang="ru-RU"/>
+          </a:p>
+        </p:txBody>
+      </p:sp>
+    </p:spTree>
+    <p:extLst>
+      <p:ext uri="{BB962C8B-B14F-4D97-AF65-F5344CB8AC3E}">
+        <p14:creationId xmlns:p14="http://schemas.microsoft.com/office/powerpoint/2010/main" val="2401903622"/>
+      </p:ext>
+    </p:extLst>
+  </p:cSld>
+  <p:clrMapOvr>
+    <a:masterClrMapping/>
+  </p:clrMapOvr>
+</p:sld>
+</file>
+
+<file path=ppt/slides/slide11.xml><?xml version="1.0" encoding="utf-8"?>
+<p:sld xmlns:a="http://schemas.openxmlformats.org/drawingml/2006/main" xmlns:r="http://schemas.openxmlformats.org/officeDocument/2006/relationships" xmlns:p="http://schemas.openxmlformats.org/presentationml/2006/main">
+  <p:cSld>
+    <p:spTree>
+      <p:nvGrpSpPr>
+        <p:cNvPr id="1" name="">
+          <a:extLst>
+            <a:ext uri="{FF2B5EF4-FFF2-40B4-BE49-F238E27FC236}">
+              <a16:creationId xmlns:a16="http://schemas.microsoft.com/office/drawing/2014/main" id="{74413BF4-EAC3-2FE2-2076-FBABF98BF05A}"/>
+            </a:ext>
+          </a:extLst>
+        </p:cNvPr>
+        <p:cNvGrpSpPr/>
+        <p:nvPr/>
+      </p:nvGrpSpPr>
+      <p:grpSpPr>
+        <a:xfrm>
+          <a:off x="0" y="0"/>
+          <a:ext cx="0" cy="0"/>
+          <a:chOff x="0" y="0"/>
+          <a:chExt cx="0" cy="0"/>
+        </a:xfrm>
+      </p:grpSpPr>
+      <p:sp>
+        <p:nvSpPr>
+          <p:cNvPr id="2" name="Заголовок 1">
+            <a:extLst>
+              <a:ext uri="{FF2B5EF4-FFF2-40B4-BE49-F238E27FC236}">
+                <a16:creationId xmlns:a16="http://schemas.microsoft.com/office/drawing/2014/main" id="{B7297FBA-3438-410D-B4AB-D423E776D89A}"/>
+              </a:ext>
+            </a:extLst>
+          </p:cNvPr>
+          <p:cNvSpPr>
+            <a:spLocks noGrp="1"/>
+          </p:cNvSpPr>
+          <p:nvPr>
+            <p:ph type="title"/>
+          </p:nvPr>
+        </p:nvSpPr>
+        <p:spPr/>
+        <p:txBody>
+          <a:bodyPr>
+            <a:noAutofit/>
+          </a:bodyPr>
+          <a:lstStyle/>
+          <a:p>
+            <a:r>
+              <a:rPr lang="ru-RU" sz="3200" dirty="0"/>
+              <a:t>Задание 3. Построить горизонтальный профиль изображения и определить линию с минимальной яркостью.</a:t>
+            </a:r>
+          </a:p>
+        </p:txBody>
+      </p:sp>
+      <p:pic>
+        <p:nvPicPr>
+          <p:cNvPr id="7" name="Рисунок 6">
+            <a:extLst>
+              <a:ext uri="{FF2B5EF4-FFF2-40B4-BE49-F238E27FC236}">
+                <a16:creationId xmlns:a16="http://schemas.microsoft.com/office/drawing/2014/main" id="{D66D9E55-821E-7C09-5A3B-53A90CF5AC85}"/>
+              </a:ext>
+            </a:extLst>
+          </p:cNvPr>
+          <p:cNvPicPr>
+            <a:picLocks noChangeAspect="1"/>
+          </p:cNvPicPr>
+          <p:nvPr/>
+        </p:nvPicPr>
+        <p:blipFill>
+          <a:blip r:embed="rId2"/>
+          <a:stretch>
+            <a:fillRect/>
+          </a:stretch>
+        </p:blipFill>
+        <p:spPr>
+          <a:xfrm>
+            <a:off x="225217" y="1188720"/>
+            <a:ext cx="7239690" cy="4325672"/>
+          </a:xfrm>
+          <a:prstGeom prst="rect">
+            <a:avLst/>
+          </a:prstGeom>
+        </p:spPr>
+      </p:pic>
+      <p:sp>
+        <p:nvSpPr>
+          <p:cNvPr id="8" name="Номер слайда 7">
+            <a:extLst>
+              <a:ext uri="{FF2B5EF4-FFF2-40B4-BE49-F238E27FC236}">
+                <a16:creationId xmlns:a16="http://schemas.microsoft.com/office/drawing/2014/main" id="{76AF999E-C755-D20F-453F-7D7223F0B382}"/>
+              </a:ext>
+            </a:extLst>
+          </p:cNvPr>
+          <p:cNvSpPr>
+            <a:spLocks noGrp="1"/>
+          </p:cNvSpPr>
+          <p:nvPr>
+            <p:ph type="sldNum" sz="quarter" idx="12"/>
+          </p:nvPr>
+        </p:nvSpPr>
+        <p:spPr/>
+        <p:txBody>
+          <a:bodyPr/>
+          <a:lstStyle/>
+          <a:p>
+            <a:fld id="{E294C9D9-2DEA-415A-A3DF-2372EDC3FB1F}" type="slidenum">
+              <a:rPr lang="ru-RU" smtClean="0"/>
+              <a:t>11</a:t>
+            </a:fld>
+            <a:endParaRPr lang="ru-RU"/>
+          </a:p>
+        </p:txBody>
+      </p:sp>
+      <p:pic>
+        <p:nvPicPr>
+          <p:cNvPr id="4" name="Рисунок 3">
+            <a:extLst>
+              <a:ext uri="{FF2B5EF4-FFF2-40B4-BE49-F238E27FC236}">
+                <a16:creationId xmlns:a16="http://schemas.microsoft.com/office/drawing/2014/main" id="{CFFF5301-FA13-A165-E3F1-3FCD4149A50B}"/>
+              </a:ext>
+            </a:extLst>
+          </p:cNvPr>
+          <p:cNvPicPr>
+            <a:picLocks noChangeAspect="1"/>
+          </p:cNvPicPr>
+          <p:nvPr/>
+        </p:nvPicPr>
+        <p:blipFill>
+          <a:blip r:embed="rId3"/>
+          <a:stretch>
+            <a:fillRect/>
+          </a:stretch>
+        </p:blipFill>
+        <p:spPr>
+          <a:xfrm>
+            <a:off x="7576456" y="1188720"/>
+            <a:ext cx="4390327" cy="4542193"/>
+          </a:xfrm>
+          <a:prstGeom prst="rect">
+            <a:avLst/>
+          </a:prstGeom>
+        </p:spPr>
+      </p:pic>
+    </p:spTree>
+    <p:extLst>
+      <p:ext uri="{BB962C8B-B14F-4D97-AF65-F5344CB8AC3E}">
+        <p14:creationId xmlns:p14="http://schemas.microsoft.com/office/powerpoint/2010/main" val="2160050398"/>
+      </p:ext>
+    </p:extLst>
+  </p:cSld>
+  <p:clrMapOvr>
+    <a:masterClrMapping/>
+  </p:clrMapOvr>
+</p:sld>
+</file>
+
+<file path=ppt/slides/slide12.xml><?xml version="1.0" encoding="utf-8"?>
+<p:sld xmlns:a="http://schemas.openxmlformats.org/drawingml/2006/main" xmlns:r="http://schemas.openxmlformats.org/officeDocument/2006/relationships" xmlns:p="http://schemas.openxmlformats.org/presentationml/2006/main">
+  <p:cSld>
+    <p:spTree>
+      <p:nvGrpSpPr>
+        <p:cNvPr id="1" name=""/>
+        <p:cNvGrpSpPr/>
+        <p:nvPr/>
+      </p:nvGrpSpPr>
+      <p:grpSpPr>
+        <a:xfrm>
+          <a:off x="0" y="0"/>
+          <a:ext cx="0" cy="0"/>
+          <a:chOff x="0" y="0"/>
+          <a:chExt cx="0" cy="0"/>
+        </a:xfrm>
+      </p:grpSpPr>
+      <p:sp>
+        <p:nvSpPr>
+          <p:cNvPr id="2" name="Заголовок 1">
+            <a:extLst>
+              <a:ext uri="{FF2B5EF4-FFF2-40B4-BE49-F238E27FC236}">
+                <a16:creationId xmlns:a16="http://schemas.microsoft.com/office/drawing/2014/main" id="{9CE88372-CFB3-403A-3670-2B19ECCCAE59}"/>
+              </a:ext>
+            </a:extLst>
+          </p:cNvPr>
+          <p:cNvSpPr>
+            <a:spLocks noGrp="1"/>
+          </p:cNvSpPr>
+          <p:nvPr>
+            <p:ph type="title"/>
+          </p:nvPr>
+        </p:nvSpPr>
+        <p:spPr/>
+        <p:txBody>
+          <a:bodyPr>
+            <a:noAutofit/>
+          </a:bodyPr>
+          <a:lstStyle/>
+          <a:p>
+            <a:r>
+              <a:rPr lang="ru-RU" sz="3200" dirty="0"/>
+              <a:t>Задание 4. Построить вертикальную проекцию изображения и определить линию с максимальной яркостью</a:t>
+            </a:r>
+          </a:p>
+        </p:txBody>
+      </p:sp>
+      <p:pic>
+        <p:nvPicPr>
+          <p:cNvPr id="5" name="Рисунок 4">
+            <a:extLst>
+              <a:ext uri="{FF2B5EF4-FFF2-40B4-BE49-F238E27FC236}">
+                <a16:creationId xmlns:a16="http://schemas.microsoft.com/office/drawing/2014/main" id="{A6CC4354-3BC5-4C51-A977-B3A2A8ABBA8F}"/>
+              </a:ext>
+            </a:extLst>
+          </p:cNvPr>
+          <p:cNvPicPr>
+            <a:picLocks noChangeAspect="1"/>
+          </p:cNvPicPr>
+          <p:nvPr/>
+        </p:nvPicPr>
+        <p:blipFill>
+          <a:blip r:embed="rId2"/>
+          <a:stretch>
+            <a:fillRect/>
+          </a:stretch>
+        </p:blipFill>
+        <p:spPr>
+          <a:xfrm>
+            <a:off x="1852020" y="1233181"/>
+            <a:ext cx="8487960" cy="4391638"/>
+          </a:xfrm>
+          <a:prstGeom prst="rect">
+            <a:avLst/>
+          </a:prstGeom>
+        </p:spPr>
+      </p:pic>
+      <p:sp>
+        <p:nvSpPr>
+          <p:cNvPr id="7" name="Номер слайда 6">
+            <a:extLst>
+              <a:ext uri="{FF2B5EF4-FFF2-40B4-BE49-F238E27FC236}">
+                <a16:creationId xmlns:a16="http://schemas.microsoft.com/office/drawing/2014/main" id="{EF85A386-2F77-B17E-B110-B0A0786CB42B}"/>
+              </a:ext>
+            </a:extLst>
+          </p:cNvPr>
+          <p:cNvSpPr>
+            <a:spLocks noGrp="1"/>
+          </p:cNvSpPr>
+          <p:nvPr>
+            <p:ph type="sldNum" sz="quarter" idx="12"/>
+          </p:nvPr>
+        </p:nvSpPr>
+        <p:spPr/>
+        <p:txBody>
+          <a:bodyPr/>
+          <a:lstStyle/>
+          <a:p>
+            <a:fld id="{E294C9D9-2DEA-415A-A3DF-2372EDC3FB1F}" type="slidenum">
+              <a:rPr lang="ru-RU" smtClean="0"/>
+              <a:t>12</a:t>
+            </a:fld>
+            <a:endParaRPr lang="ru-RU"/>
+          </a:p>
+        </p:txBody>
+      </p:sp>
+    </p:spTree>
+    <p:extLst>
+      <p:ext uri="{BB962C8B-B14F-4D97-AF65-F5344CB8AC3E}">
+        <p14:creationId xmlns:p14="http://schemas.microsoft.com/office/powerpoint/2010/main" val="3893364793"/>
+      </p:ext>
+    </p:extLst>
+  </p:cSld>
+  <p:clrMapOvr>
+    <a:masterClrMapping/>
+  </p:clrMapOvr>
+</p:sld>
+</file>
+
+<file path=ppt/slides/slide13.xml><?xml version="1.0" encoding="utf-8"?>
+<p:sld xmlns:a="http://schemas.openxmlformats.org/drawingml/2006/main" xmlns:r="http://schemas.openxmlformats.org/officeDocument/2006/relationships" xmlns:p="http://schemas.openxmlformats.org/presentationml/2006/main">
+  <p:cSld>
+    <p:spTree>
+      <p:nvGrpSpPr>
         <p:cNvPr id="1" name="">
           <a:extLst>
             <a:ext uri="{FF2B5EF4-FFF2-40B4-BE49-F238E27FC236}">
@@ -9715,7 +10113,7 @@
           <a:p>
             <a:fld id="{E294C9D9-2DEA-415A-A3DF-2372EDC3FB1F}" type="slidenum">
               <a:rPr lang="ru-RU" smtClean="0"/>
-              <a:t>10</a:t>
+              <a:t>13</a:t>
             </a:fld>
             <a:endParaRPr lang="ru-RU"/>
           </a:p>
@@ -9764,7 +10162,7 @@
 </p:sld>
 </file>
 
-<file path=ppt/slides/slide11.xml><?xml version="1.0" encoding="utf-8"?>
+<file path=ppt/slides/slide14.xml><?xml version="1.0" encoding="utf-8"?>
 <p:sld xmlns:a="http://schemas.openxmlformats.org/drawingml/2006/main" xmlns:r="http://schemas.openxmlformats.org/officeDocument/2006/relationships" xmlns:p="http://schemas.openxmlformats.org/presentationml/2006/main">
   <p:cSld>
     <p:spTree>
@@ -9894,7 +10292,7 @@
           <a:p>
             <a:fld id="{E294C9D9-2DEA-415A-A3DF-2372EDC3FB1F}" type="slidenum">
               <a:rPr lang="ru-RU" smtClean="0"/>
-              <a:t>11</a:t>
+              <a:t>14</a:t>
             </a:fld>
             <a:endParaRPr lang="ru-RU"/>
           </a:p>
@@ -9943,7 +10341,7 @@
 </p:sld>
 </file>
 
-<file path=ppt/slides/slide12.xml><?xml version="1.0" encoding="utf-8"?>
+<file path=ppt/slides/slide15.xml><?xml version="1.0" encoding="utf-8"?>
 <p:sld xmlns:a="http://schemas.openxmlformats.org/drawingml/2006/main" xmlns:r="http://schemas.openxmlformats.org/officeDocument/2006/relationships" xmlns:p="http://schemas.openxmlformats.org/presentationml/2006/main">
   <p:cSld>
     <p:spTree>
@@ -10019,7 +10417,7 @@
           <a:p>
             <a:fld id="{E294C9D9-2DEA-415A-A3DF-2372EDC3FB1F}" type="slidenum">
               <a:rPr lang="ru-RU" smtClean="0"/>
-              <a:t>12</a:t>
+              <a:t>15</a:t>
             </a:fld>
             <a:endParaRPr lang="ru-RU"/>
           </a:p>
@@ -10068,7 +10466,7 @@
 </p:sld>
 </file>
 
-<file path=ppt/slides/slide13.xml><?xml version="1.0" encoding="utf-8"?>
+<file path=ppt/slides/slide16.xml><?xml version="1.0" encoding="utf-8"?>
 <p:sld xmlns:a="http://schemas.openxmlformats.org/drawingml/2006/main" xmlns:r="http://schemas.openxmlformats.org/officeDocument/2006/relationships" xmlns:p="http://schemas.openxmlformats.org/presentationml/2006/main">
   <p:cSld>
     <p:spTree>
@@ -10144,7 +10542,7 @@
           <a:p>
             <a:fld id="{E294C9D9-2DEA-415A-A3DF-2372EDC3FB1F}" type="slidenum">
               <a:rPr lang="ru-RU" smtClean="0"/>
-              <a:t>13</a:t>
+              <a:t>16</a:t>
             </a:fld>
             <a:endParaRPr lang="ru-RU"/>
           </a:p>
@@ -10193,7 +10591,7 @@
 </p:sld>
 </file>
 
-<file path=ppt/slides/slide14.xml><?xml version="1.0" encoding="utf-8"?>
+<file path=ppt/slides/slide17.xml><?xml version="1.0" encoding="utf-8"?>
 <p:sld xmlns:a="http://schemas.openxmlformats.org/drawingml/2006/main" xmlns:r="http://schemas.openxmlformats.org/officeDocument/2006/relationships" xmlns:p="http://schemas.openxmlformats.org/presentationml/2006/main">
   <p:cSld>
     <p:spTree>
@@ -10299,7 +10697,7 @@
           <a:p>
             <a:fld id="{E294C9D9-2DEA-415A-A3DF-2372EDC3FB1F}" type="slidenum">
               <a:rPr lang="ru-RU" smtClean="0"/>
-              <a:t>14</a:t>
+              <a:t>17</a:t>
             </a:fld>
             <a:endParaRPr lang="ru-RU"/>
           </a:p>
@@ -10348,7 +10746,7 @@
 </p:sld>
 </file>
 
-<file path=ppt/slides/slide15.xml><?xml version="1.0" encoding="utf-8"?>
+<file path=ppt/slides/slide18.xml><?xml version="1.0" encoding="utf-8"?>
 <p:sld xmlns:a="http://schemas.openxmlformats.org/drawingml/2006/main" xmlns:r="http://schemas.openxmlformats.org/officeDocument/2006/relationships" xmlns:p="http://schemas.openxmlformats.org/presentationml/2006/main">
   <p:cSld>
     <p:spTree>
@@ -10531,7 +10929,7 @@
           <a:p>
             <a:fld id="{E294C9D9-2DEA-415A-A3DF-2372EDC3FB1F}" type="slidenum">
               <a:rPr lang="ru-RU" smtClean="0"/>
-              <a:t>15</a:t>
+              <a:t>18</a:t>
             </a:fld>
             <a:endParaRPr lang="ru-RU"/>
           </a:p>
@@ -10550,7 +10948,7 @@
 </p:sld>
 </file>
 
-<file path=ppt/slides/slide16.xml><?xml version="1.0" encoding="utf-8"?>
+<file path=ppt/slides/slide19.xml><?xml version="1.0" encoding="utf-8"?>
 <p:sld xmlns:a="http://schemas.openxmlformats.org/drawingml/2006/main" xmlns:r="http://schemas.openxmlformats.org/officeDocument/2006/relationships" xmlns:p="http://schemas.openxmlformats.org/presentationml/2006/main">
   <p:cSld>
     <p:spTree>
@@ -10757,7 +11155,7 @@
           <a:p>
             <a:fld id="{E294C9D9-2DEA-415A-A3DF-2372EDC3FB1F}" type="slidenum">
               <a:rPr lang="ru-RU" smtClean="0"/>
-              <a:t>16</a:t>
+              <a:t>19</a:t>
             </a:fld>
             <a:endParaRPr lang="ru-RU"/>
           </a:p>
@@ -11457,12 +11855,92 @@
           </a:p>
         </p:txBody>
       </p:sp>
+      <p:sp>
+        <p:nvSpPr>
+          <p:cNvPr id="21" name="Номер слайда 20">
+            <a:extLst>
+              <a:ext uri="{FF2B5EF4-FFF2-40B4-BE49-F238E27FC236}">
+                <a16:creationId xmlns:a16="http://schemas.microsoft.com/office/drawing/2014/main" id="{8F2C6A5B-0166-F165-EE38-02833D983E1B}"/>
+              </a:ext>
+            </a:extLst>
+          </p:cNvPr>
+          <p:cNvSpPr>
+            <a:spLocks noGrp="1"/>
+          </p:cNvSpPr>
+          <p:nvPr>
+            <p:ph type="sldNum" sz="quarter" idx="12"/>
+          </p:nvPr>
+        </p:nvSpPr>
+        <p:spPr/>
+        <p:txBody>
+          <a:bodyPr/>
+          <a:lstStyle/>
+          <a:p>
+            <a:fld id="{E294C9D9-2DEA-415A-A3DF-2372EDC3FB1F}" type="slidenum">
+              <a:rPr lang="ru-RU" smtClean="0"/>
+              <a:t>6</a:t>
+            </a:fld>
+            <a:endParaRPr lang="ru-RU"/>
+          </a:p>
+        </p:txBody>
+      </p:sp>
+      <p:sp>
+        <p:nvSpPr>
+          <p:cNvPr id="7" name="TextBox 6">
+            <a:extLst>
+              <a:ext uri="{FF2B5EF4-FFF2-40B4-BE49-F238E27FC236}">
+                <a16:creationId xmlns:a16="http://schemas.microsoft.com/office/drawing/2014/main" id="{7069AFC9-F4EF-7382-D091-C2F586E3943F}"/>
+              </a:ext>
+            </a:extLst>
+          </p:cNvPr>
+          <p:cNvSpPr txBox="1"/>
+          <p:nvPr/>
+        </p:nvSpPr>
+        <p:spPr>
+          <a:xfrm>
+            <a:off x="908913" y="5669279"/>
+            <a:ext cx="5455917" cy="646331"/>
+          </a:xfrm>
+          <a:prstGeom prst="rect">
+            <a:avLst/>
+          </a:prstGeom>
+          <a:noFill/>
+        </p:spPr>
+        <p:txBody>
+          <a:bodyPr wrap="none" rtlCol="0">
+            <a:spAutoFit/>
+          </a:bodyPr>
+          <a:lstStyle/>
+          <a:p>
+            <a:pPr marL="342900" indent="-342900">
+              <a:buAutoNum type="arabicPeriod"/>
+            </a:pPr>
+            <a:r>
+              <a:rPr lang="ru-RU" dirty="0"/>
+              <a:t>Разделение каналов: срезы </a:t>
+            </a:r>
+            <a:r>
+              <a:rPr lang="en-US" dirty="0"/>
+              <a:t>NumPy</a:t>
+            </a:r>
+          </a:p>
+          <a:p>
+            <a:pPr marL="342900" indent="-342900">
+              <a:buAutoNum type="arabicPeriod"/>
+            </a:pPr>
+            <a:r>
+              <a:rPr lang="ru-RU" dirty="0"/>
+              <a:t>Построение гистограммы яркости: cv2.calcHist()</a:t>
+            </a:r>
+          </a:p>
+        </p:txBody>
+      </p:sp>
       <p:pic>
         <p:nvPicPr>
-          <p:cNvPr id="15" name="Рисунок 14">
-            <a:extLst>
-              <a:ext uri="{FF2B5EF4-FFF2-40B4-BE49-F238E27FC236}">
-                <a16:creationId xmlns:a16="http://schemas.microsoft.com/office/drawing/2014/main" id="{CB3FC02B-5521-12D8-CA47-CB9D1FA7E0F5}"/>
+          <p:cNvPr id="11" name="Рисунок 10">
+            <a:extLst>
+              <a:ext uri="{FF2B5EF4-FFF2-40B4-BE49-F238E27FC236}">
+                <a16:creationId xmlns:a16="http://schemas.microsoft.com/office/drawing/2014/main" id="{92A56618-6E57-A2C7-5F81-8F6B5EF43519}"/>
               </a:ext>
             </a:extLst>
           </p:cNvPr>
@@ -11479,133 +11957,14 @@
         </p:blipFill>
         <p:spPr>
           <a:xfrm>
-            <a:off x="182880" y="1546039"/>
-            <a:ext cx="7395552" cy="3765922"/>
-          </a:xfrm>
-          <a:prstGeom prst="rect">
-            <a:avLst/>
-          </a:prstGeom>
-          <a:solidFill>
-            <a:srgbClr val="FFFFFF">
-              <a:shade val="85000"/>
-            </a:srgbClr>
-          </a:solidFill>
-          <a:ln w="88900" cap="sq">
-            <a:solidFill>
-              <a:srgbClr val="FFFFFF"/>
-            </a:solidFill>
-            <a:miter lim="800000"/>
-          </a:ln>
-          <a:effectLst>
-            <a:outerShdw blurRad="55000" dist="18000" dir="5400000" algn="tl" rotWithShape="0">
-              <a:srgbClr val="000000">
-                <a:alpha val="40000"/>
-              </a:srgbClr>
-            </a:outerShdw>
-          </a:effectLst>
-          <a:scene3d>
-            <a:camera prst="orthographicFront"/>
-            <a:lightRig rig="twoPt" dir="t">
-              <a:rot lat="0" lon="0" rev="7200000"/>
-            </a:lightRig>
-          </a:scene3d>
-          <a:sp3d>
-            <a:bevelT w="25400" h="19050"/>
-            <a:contourClr>
-              <a:srgbClr val="FFFFFF"/>
-            </a:contourClr>
-          </a:sp3d>
-        </p:spPr>
-      </p:pic>
-      <p:pic>
-        <p:nvPicPr>
-          <p:cNvPr id="17" name="Рисунок 16">
-            <a:extLst>
-              <a:ext uri="{FF2B5EF4-FFF2-40B4-BE49-F238E27FC236}">
-                <a16:creationId xmlns:a16="http://schemas.microsoft.com/office/drawing/2014/main" id="{F899A5F4-CEFB-842C-1078-5B366E33B7BE}"/>
-              </a:ext>
-            </a:extLst>
-          </p:cNvPr>
-          <p:cNvPicPr>
-            <a:picLocks noChangeAspect="1"/>
-          </p:cNvPicPr>
-          <p:nvPr/>
-        </p:nvPicPr>
-        <p:blipFill>
-          <a:blip r:embed="rId3"/>
-          <a:stretch>
-            <a:fillRect/>
-          </a:stretch>
-        </p:blipFill>
-        <p:spPr>
-          <a:xfrm>
-            <a:off x="7722322" y="4790879"/>
-            <a:ext cx="2657846" cy="609685"/>
+            <a:off x="908913" y="1390365"/>
+            <a:ext cx="10374173" cy="4077269"/>
           </a:xfrm>
           <a:prstGeom prst="rect">
             <a:avLst/>
           </a:prstGeom>
         </p:spPr>
       </p:pic>
-      <p:pic>
-        <p:nvPicPr>
-          <p:cNvPr id="19" name="Рисунок 18">
-            <a:extLst>
-              <a:ext uri="{FF2B5EF4-FFF2-40B4-BE49-F238E27FC236}">
-                <a16:creationId xmlns:a16="http://schemas.microsoft.com/office/drawing/2014/main" id="{D3113550-0B81-47AE-BF1C-DCCFBCF8E36F}"/>
-              </a:ext>
-            </a:extLst>
-          </p:cNvPr>
-          <p:cNvPicPr>
-            <a:picLocks noChangeAspect="1"/>
-          </p:cNvPicPr>
-          <p:nvPr/>
-        </p:nvPicPr>
-        <p:blipFill>
-          <a:blip r:embed="rId4"/>
-          <a:stretch>
-            <a:fillRect/>
-          </a:stretch>
-        </p:blipFill>
-        <p:spPr>
-          <a:xfrm>
-            <a:off x="7722322" y="1505957"/>
-            <a:ext cx="4492703" cy="2967684"/>
-          </a:xfrm>
-          <a:prstGeom prst="rect">
-            <a:avLst/>
-          </a:prstGeom>
-        </p:spPr>
-      </p:pic>
-      <p:sp>
-        <p:nvSpPr>
-          <p:cNvPr id="21" name="Номер слайда 20">
-            <a:extLst>
-              <a:ext uri="{FF2B5EF4-FFF2-40B4-BE49-F238E27FC236}">
-                <a16:creationId xmlns:a16="http://schemas.microsoft.com/office/drawing/2014/main" id="{8F2C6A5B-0166-F165-EE38-02833D983E1B}"/>
-              </a:ext>
-            </a:extLst>
-          </p:cNvPr>
-          <p:cNvSpPr>
-            <a:spLocks noGrp="1"/>
-          </p:cNvSpPr>
-          <p:nvPr>
-            <p:ph type="sldNum" sz="quarter" idx="12"/>
-          </p:nvPr>
-        </p:nvSpPr>
-        <p:spPr/>
-        <p:txBody>
-          <a:bodyPr/>
-          <a:lstStyle/>
-          <a:p>
-            <a:fld id="{E294C9D9-2DEA-415A-A3DF-2372EDC3FB1F}" type="slidenum">
-              <a:rPr lang="ru-RU" smtClean="0"/>
-              <a:t>6</a:t>
-            </a:fld>
-            <a:endParaRPr lang="ru-RU"/>
-          </a:p>
-        </p:txBody>
-      </p:sp>
     </p:spTree>
     <p:extLst>
       <p:ext uri="{BB962C8B-B14F-4D97-AF65-F5344CB8AC3E}">
@@ -11624,7 +11983,13 @@
   <p:cSld>
     <p:spTree>
       <p:nvGrpSpPr>
-        <p:cNvPr id="1" name=""/>
+        <p:cNvPr id="1" name="">
+          <a:extLst>
+            <a:ext uri="{FF2B5EF4-FFF2-40B4-BE49-F238E27FC236}">
+              <a16:creationId xmlns:a16="http://schemas.microsoft.com/office/drawing/2014/main" id="{48123201-059F-9AF9-5FF8-4D4FFD6BFB68}"/>
+            </a:ext>
+          </a:extLst>
+        </p:cNvPr>
         <p:cNvGrpSpPr/>
         <p:nvPr/>
       </p:nvGrpSpPr>
@@ -11641,7 +12006,7 @@
           <p:cNvPr id="2" name="Заголовок 1">
             <a:extLst>
               <a:ext uri="{FF2B5EF4-FFF2-40B4-BE49-F238E27FC236}">
-                <a16:creationId xmlns:a16="http://schemas.microsoft.com/office/drawing/2014/main" id="{A0970074-39AE-C233-F2A7-9E7323F343C8}"/>
+                <a16:creationId xmlns:a16="http://schemas.microsoft.com/office/drawing/2014/main" id="{F89277B4-911E-46F3-58EC-8BE3759248E2}"/>
               </a:ext>
             </a:extLst>
           </p:cNvPr>
@@ -11655,82 +12020,132 @@
         <p:spPr/>
         <p:txBody>
           <a:bodyPr>
-            <a:noAutofit/>
+            <a:normAutofit/>
           </a:bodyPr>
           <a:lstStyle/>
           <a:p>
             <a:r>
               <a:rPr lang="ru-RU" sz="3200" dirty="0"/>
-              <a:t>Задание 3. Построить горизонтальный профиль изображения и определить линию с минимальной яркостью.</a:t>
+              <a:t>Задание 2. Построить гистограммы R, G, B и определить наиболее насыщенный канал.</a:t>
+            </a:r>
+          </a:p>
+        </p:txBody>
+      </p:sp>
+      <p:sp>
+        <p:nvSpPr>
+          <p:cNvPr id="21" name="Номер слайда 20">
+            <a:extLst>
+              <a:ext uri="{FF2B5EF4-FFF2-40B4-BE49-F238E27FC236}">
+                <a16:creationId xmlns:a16="http://schemas.microsoft.com/office/drawing/2014/main" id="{1552F3F0-E1DD-25D9-A720-949711995751}"/>
+              </a:ext>
+            </a:extLst>
+          </p:cNvPr>
+          <p:cNvSpPr>
+            <a:spLocks noGrp="1"/>
+          </p:cNvSpPr>
+          <p:nvPr>
+            <p:ph type="sldNum" sz="quarter" idx="12"/>
+          </p:nvPr>
+        </p:nvSpPr>
+        <p:spPr/>
+        <p:txBody>
+          <a:bodyPr/>
+          <a:lstStyle/>
+          <a:p>
+            <a:fld id="{E294C9D9-2DEA-415A-A3DF-2372EDC3FB1F}" type="slidenum">
+              <a:rPr lang="ru-RU" smtClean="0"/>
+              <a:t>7</a:t>
+            </a:fld>
+            <a:endParaRPr lang="ru-RU"/>
+          </a:p>
+        </p:txBody>
+      </p:sp>
+      <p:sp>
+        <p:nvSpPr>
+          <p:cNvPr id="7" name="TextBox 6">
+            <a:extLst>
+              <a:ext uri="{FF2B5EF4-FFF2-40B4-BE49-F238E27FC236}">
+                <a16:creationId xmlns:a16="http://schemas.microsoft.com/office/drawing/2014/main" id="{0764FF4A-B384-6662-20D5-A6376DA6004F}"/>
+              </a:ext>
+            </a:extLst>
+          </p:cNvPr>
+          <p:cNvSpPr txBox="1"/>
+          <p:nvPr/>
+        </p:nvSpPr>
+        <p:spPr>
+          <a:xfrm>
+            <a:off x="908913" y="5669279"/>
+            <a:ext cx="5455917" cy="646331"/>
+          </a:xfrm>
+          <a:prstGeom prst="rect">
+            <a:avLst/>
+          </a:prstGeom>
+          <a:noFill/>
+        </p:spPr>
+        <p:txBody>
+          <a:bodyPr wrap="none" rtlCol="0">
+            <a:spAutoFit/>
+          </a:bodyPr>
+          <a:lstStyle/>
+          <a:p>
+            <a:pPr marL="342900" indent="-342900">
+              <a:buAutoNum type="arabicPeriod"/>
+            </a:pPr>
+            <a:r>
+              <a:rPr lang="ru-RU" dirty="0"/>
+              <a:t>Разделение каналов: срезы </a:t>
+            </a:r>
+            <a:r>
+              <a:rPr lang="en-US" dirty="0"/>
+              <a:t>NumPy</a:t>
+            </a:r>
+          </a:p>
+          <a:p>
+            <a:pPr marL="342900" indent="-342900">
+              <a:buAutoNum type="arabicPeriod"/>
+            </a:pPr>
+            <a:r>
+              <a:rPr lang="ru-RU" dirty="0"/>
+              <a:t>Построение гистограммы яркости: cv2.calcHist()</a:t>
             </a:r>
           </a:p>
         </p:txBody>
       </p:sp>
       <p:pic>
         <p:nvPicPr>
-          <p:cNvPr id="5" name="Объект 4">
-            <a:extLst>
-              <a:ext uri="{FF2B5EF4-FFF2-40B4-BE49-F238E27FC236}">
-                <a16:creationId xmlns:a16="http://schemas.microsoft.com/office/drawing/2014/main" id="{37FCD15C-84FF-0773-18A9-5D5D20A4FD43}"/>
+          <p:cNvPr id="4" name="Рисунок 3">
+            <a:extLst>
+              <a:ext uri="{FF2B5EF4-FFF2-40B4-BE49-F238E27FC236}">
+                <a16:creationId xmlns:a16="http://schemas.microsoft.com/office/drawing/2014/main" id="{3DC037BE-FBE9-D40D-9F3C-8C94FDCD3F4D}"/>
               </a:ext>
             </a:extLst>
           </p:cNvPr>
           <p:cNvPicPr>
-            <a:picLocks noGrp="1" noChangeAspect="1"/>
+            <a:picLocks noChangeAspect="1"/>
           </p:cNvPicPr>
-          <p:nvPr>
-            <p:ph idx="1"/>
-          </p:nvPr>
+          <p:nvPr/>
         </p:nvPicPr>
         <p:blipFill>
           <a:blip r:embed="rId2"/>
+          <a:srcRect l="162"/>
           <a:stretch>
             <a:fillRect/>
           </a:stretch>
         </p:blipFill>
         <p:spPr>
           <a:xfrm>
-            <a:off x="684987" y="1785980"/>
-            <a:ext cx="10822025" cy="3286040"/>
+            <a:off x="1176603" y="1366549"/>
+            <a:ext cx="10376454" cy="4124901"/>
           </a:xfrm>
           <a:prstGeom prst="rect">
             <a:avLst/>
           </a:prstGeom>
         </p:spPr>
       </p:pic>
-      <p:sp>
-        <p:nvSpPr>
-          <p:cNvPr id="11" name="Номер слайда 10">
-            <a:extLst>
-              <a:ext uri="{FF2B5EF4-FFF2-40B4-BE49-F238E27FC236}">
-                <a16:creationId xmlns:a16="http://schemas.microsoft.com/office/drawing/2014/main" id="{54E197D6-2512-A5B0-592D-84C6614DC2C4}"/>
-              </a:ext>
-            </a:extLst>
-          </p:cNvPr>
-          <p:cNvSpPr>
-            <a:spLocks noGrp="1"/>
-          </p:cNvSpPr>
-          <p:nvPr>
-            <p:ph type="sldNum" sz="quarter" idx="12"/>
-          </p:nvPr>
-        </p:nvSpPr>
-        <p:spPr/>
-        <p:txBody>
-          <a:bodyPr/>
-          <a:lstStyle/>
-          <a:p>
-            <a:fld id="{E294C9D9-2DEA-415A-A3DF-2372EDC3FB1F}" type="slidenum">
-              <a:rPr lang="ru-RU" smtClean="0"/>
-              <a:t>7</a:t>
-            </a:fld>
-            <a:endParaRPr lang="ru-RU"/>
-          </a:p>
-        </p:txBody>
-      </p:sp>
     </p:spTree>
     <p:extLst>
       <p:ext uri="{BB962C8B-B14F-4D97-AF65-F5344CB8AC3E}">
-        <p14:creationId xmlns:p14="http://schemas.microsoft.com/office/powerpoint/2010/main" val="2401903622"/>
+        <p14:creationId xmlns:p14="http://schemas.microsoft.com/office/powerpoint/2010/main" val="3520749913"/>
       </p:ext>
     </p:extLst>
   </p:cSld>
@@ -11748,7 +12163,7 @@
         <p:cNvPr id="1" name="">
           <a:extLst>
             <a:ext uri="{FF2B5EF4-FFF2-40B4-BE49-F238E27FC236}">
-              <a16:creationId xmlns:a16="http://schemas.microsoft.com/office/drawing/2014/main" id="{74413BF4-EAC3-2FE2-2076-FBABF98BF05A}"/>
+              <a16:creationId xmlns:a16="http://schemas.microsoft.com/office/drawing/2014/main" id="{69CB483A-9AFF-83D1-E349-0A0356079822}"/>
             </a:ext>
           </a:extLst>
         </p:cNvPr>
@@ -11768,7 +12183,7 @@
           <p:cNvPr id="2" name="Заголовок 1">
             <a:extLst>
               <a:ext uri="{FF2B5EF4-FFF2-40B4-BE49-F238E27FC236}">
-                <a16:creationId xmlns:a16="http://schemas.microsoft.com/office/drawing/2014/main" id="{B7297FBA-3438-410D-B4AB-D423E776D89A}"/>
+                <a16:creationId xmlns:a16="http://schemas.microsoft.com/office/drawing/2014/main" id="{0316FC97-9267-08E2-403C-ACF0893B591D}"/>
               </a:ext>
             </a:extLst>
           </p:cNvPr>
@@ -11782,23 +12197,103 @@
         <p:spPr/>
         <p:txBody>
           <a:bodyPr>
-            <a:noAutofit/>
+            <a:normAutofit/>
           </a:bodyPr>
           <a:lstStyle/>
           <a:p>
             <a:r>
               <a:rPr lang="ru-RU" sz="3200" dirty="0"/>
-              <a:t>Задание 3. Построить горизонтальный профиль изображения и определить линию с минимальной яркостью.</a:t>
+              <a:t>Задание 2. Построить гистограммы R, G, B и определить наиболее насыщенный канал.</a:t>
+            </a:r>
+          </a:p>
+        </p:txBody>
+      </p:sp>
+      <p:sp>
+        <p:nvSpPr>
+          <p:cNvPr id="21" name="Номер слайда 20">
+            <a:extLst>
+              <a:ext uri="{FF2B5EF4-FFF2-40B4-BE49-F238E27FC236}">
+                <a16:creationId xmlns:a16="http://schemas.microsoft.com/office/drawing/2014/main" id="{0E0ED3A5-E24F-196C-EFF5-7A86B7656C81}"/>
+              </a:ext>
+            </a:extLst>
+          </p:cNvPr>
+          <p:cNvSpPr>
+            <a:spLocks noGrp="1"/>
+          </p:cNvSpPr>
+          <p:nvPr>
+            <p:ph type="sldNum" sz="quarter" idx="12"/>
+          </p:nvPr>
+        </p:nvSpPr>
+        <p:spPr/>
+        <p:txBody>
+          <a:bodyPr/>
+          <a:lstStyle/>
+          <a:p>
+            <a:fld id="{E294C9D9-2DEA-415A-A3DF-2372EDC3FB1F}" type="slidenum">
+              <a:rPr lang="ru-RU" smtClean="0"/>
+              <a:t>8</a:t>
+            </a:fld>
+            <a:endParaRPr lang="ru-RU"/>
+          </a:p>
+        </p:txBody>
+      </p:sp>
+      <p:sp>
+        <p:nvSpPr>
+          <p:cNvPr id="7" name="TextBox 6">
+            <a:extLst>
+              <a:ext uri="{FF2B5EF4-FFF2-40B4-BE49-F238E27FC236}">
+                <a16:creationId xmlns:a16="http://schemas.microsoft.com/office/drawing/2014/main" id="{36400A15-58B4-0877-C43E-E12D3BD144FD}"/>
+              </a:ext>
+            </a:extLst>
+          </p:cNvPr>
+          <p:cNvSpPr txBox="1"/>
+          <p:nvPr/>
+        </p:nvSpPr>
+        <p:spPr>
+          <a:xfrm>
+            <a:off x="908913" y="5669279"/>
+            <a:ext cx="5455917" cy="646331"/>
+          </a:xfrm>
+          <a:prstGeom prst="rect">
+            <a:avLst/>
+          </a:prstGeom>
+          <a:noFill/>
+        </p:spPr>
+        <p:txBody>
+          <a:bodyPr wrap="none" rtlCol="0">
+            <a:spAutoFit/>
+          </a:bodyPr>
+          <a:lstStyle/>
+          <a:p>
+            <a:pPr marL="342900" indent="-342900">
+              <a:buAutoNum type="arabicPeriod"/>
+            </a:pPr>
+            <a:r>
+              <a:rPr lang="ru-RU" dirty="0"/>
+              <a:t>Разделение каналов: срезы </a:t>
+            </a:r>
+            <a:r>
+              <a:rPr lang="en-US" dirty="0"/>
+              <a:t>NumPy</a:t>
+            </a:r>
+          </a:p>
+          <a:p>
+            <a:pPr marL="342900" indent="-342900">
+              <a:buAutoNum type="arabicPeriod"/>
+            </a:pPr>
+            <a:r>
+              <a:rPr lang="ru-RU" dirty="0"/>
+              <a:t>Построение гистограммы яркости: cv2.calcHist()</a:t>
             </a:r>
           </a:p>
         </p:txBody>
       </p:sp>
       <p:pic>
         <p:nvPicPr>
-          <p:cNvPr id="7" name="Рисунок 6">
-            <a:extLst>
-              <a:ext uri="{FF2B5EF4-FFF2-40B4-BE49-F238E27FC236}">
-                <a16:creationId xmlns:a16="http://schemas.microsoft.com/office/drawing/2014/main" id="{D66D9E55-821E-7C09-5A3B-53A90CF5AC85}"/>
+          <p:cNvPr id="4" name="Рисунок 3">
+            <a:extLst>
+              <a:ext uri="{FF2B5EF4-FFF2-40B4-BE49-F238E27FC236}">
+                <a16:creationId xmlns:a16="http://schemas.microsoft.com/office/drawing/2014/main" id="{77EA2C12-6A2A-D4D7-DFAD-19FA61362296}"/>
               </a:ext>
             </a:extLst>
           </p:cNvPr>
@@ -11809,73 +12304,15 @@
         </p:nvPicPr>
         <p:blipFill>
           <a:blip r:embed="rId2"/>
+          <a:srcRect l="728"/>
           <a:stretch>
             <a:fillRect/>
           </a:stretch>
         </p:blipFill>
         <p:spPr>
           <a:xfrm>
-            <a:off x="225217" y="1188720"/>
-            <a:ext cx="7239690" cy="4325672"/>
-          </a:xfrm>
-          <a:prstGeom prst="rect">
-            <a:avLst/>
-          </a:prstGeom>
-        </p:spPr>
-      </p:pic>
-      <p:sp>
-        <p:nvSpPr>
-          <p:cNvPr id="8" name="Номер слайда 7">
-            <a:extLst>
-              <a:ext uri="{FF2B5EF4-FFF2-40B4-BE49-F238E27FC236}">
-                <a16:creationId xmlns:a16="http://schemas.microsoft.com/office/drawing/2014/main" id="{76AF999E-C755-D20F-453F-7D7223F0B382}"/>
-              </a:ext>
-            </a:extLst>
-          </p:cNvPr>
-          <p:cNvSpPr>
-            <a:spLocks noGrp="1"/>
-          </p:cNvSpPr>
-          <p:nvPr>
-            <p:ph type="sldNum" sz="quarter" idx="12"/>
-          </p:nvPr>
-        </p:nvSpPr>
-        <p:spPr/>
-        <p:txBody>
-          <a:bodyPr/>
-          <a:lstStyle/>
-          <a:p>
-            <a:fld id="{E294C9D9-2DEA-415A-A3DF-2372EDC3FB1F}" type="slidenum">
-              <a:rPr lang="ru-RU" smtClean="0"/>
-              <a:t>8</a:t>
-            </a:fld>
-            <a:endParaRPr lang="ru-RU"/>
-          </a:p>
-        </p:txBody>
-      </p:sp>
-      <p:pic>
-        <p:nvPicPr>
-          <p:cNvPr id="4" name="Рисунок 3">
-            <a:extLst>
-              <a:ext uri="{FF2B5EF4-FFF2-40B4-BE49-F238E27FC236}">
-                <a16:creationId xmlns:a16="http://schemas.microsoft.com/office/drawing/2014/main" id="{CFFF5301-FA13-A165-E3F1-3FCD4149A50B}"/>
-              </a:ext>
-            </a:extLst>
-          </p:cNvPr>
-          <p:cNvPicPr>
-            <a:picLocks noChangeAspect="1"/>
-          </p:cNvPicPr>
-          <p:nvPr/>
-        </p:nvPicPr>
-        <p:blipFill>
-          <a:blip r:embed="rId3"/>
-          <a:stretch>
-            <a:fillRect/>
-          </a:stretch>
-        </p:blipFill>
-        <p:spPr>
-          <a:xfrm>
-            <a:off x="7576456" y="1188720"/>
-            <a:ext cx="4390327" cy="4542193"/>
+            <a:off x="979714" y="1395128"/>
+            <a:ext cx="10308135" cy="4067743"/>
           </a:xfrm>
           <a:prstGeom prst="rect">
             <a:avLst/>
@@ -11885,7 +12322,7 @@
     </p:spTree>
     <p:extLst>
       <p:ext uri="{BB962C8B-B14F-4D97-AF65-F5344CB8AC3E}">
-        <p14:creationId xmlns:p14="http://schemas.microsoft.com/office/powerpoint/2010/main" val="2160050398"/>
+        <p14:creationId xmlns:p14="http://schemas.microsoft.com/office/powerpoint/2010/main" val="1917521903"/>
       </p:ext>
     </p:extLst>
   </p:cSld>
@@ -11900,7 +12337,13 @@
   <p:cSld>
     <p:spTree>
       <p:nvGrpSpPr>
-        <p:cNvPr id="1" name=""/>
+        <p:cNvPr id="1" name="">
+          <a:extLst>
+            <a:ext uri="{FF2B5EF4-FFF2-40B4-BE49-F238E27FC236}">
+              <a16:creationId xmlns:a16="http://schemas.microsoft.com/office/drawing/2014/main" id="{310D4F2A-9C96-DC0E-A429-B0BCB7AC4D77}"/>
+            </a:ext>
+          </a:extLst>
+        </p:cNvPr>
         <p:cNvGrpSpPr/>
         <p:nvPr/>
       </p:nvGrpSpPr>
@@ -11917,7 +12360,7 @@
           <p:cNvPr id="2" name="Заголовок 1">
             <a:extLst>
               <a:ext uri="{FF2B5EF4-FFF2-40B4-BE49-F238E27FC236}">
-                <a16:creationId xmlns:a16="http://schemas.microsoft.com/office/drawing/2014/main" id="{9CE88372-CFB3-403A-3670-2B19ECCCAE59}"/>
+                <a16:creationId xmlns:a16="http://schemas.microsoft.com/office/drawing/2014/main" id="{9F94D073-DF8D-98A5-3E94-EEE87F5EB6CB}"/>
               </a:ext>
             </a:extLst>
           </p:cNvPr>
@@ -11931,23 +12374,142 @@
         <p:spPr/>
         <p:txBody>
           <a:bodyPr>
-            <a:noAutofit/>
+            <a:normAutofit/>
           </a:bodyPr>
           <a:lstStyle/>
           <a:p>
             <a:r>
               <a:rPr lang="ru-RU" sz="3200" dirty="0"/>
-              <a:t>Задание 4. Построить вертикальную проекцию изображения и определить линию с максимальной яркостью</a:t>
-            </a:r>
+              <a:t>Задание 2. Построить гистограммы R, G, B и определить наиболее насыщенный канал.</a:t>
+            </a:r>
+          </a:p>
+        </p:txBody>
+      </p:sp>
+      <p:sp>
+        <p:nvSpPr>
+          <p:cNvPr id="21" name="Номер слайда 20">
+            <a:extLst>
+              <a:ext uri="{FF2B5EF4-FFF2-40B4-BE49-F238E27FC236}">
+                <a16:creationId xmlns:a16="http://schemas.microsoft.com/office/drawing/2014/main" id="{1E9CD374-0C79-D5E5-3A97-5DAAE8CBBC3B}"/>
+              </a:ext>
+            </a:extLst>
+          </p:cNvPr>
+          <p:cNvSpPr>
+            <a:spLocks noGrp="1"/>
+          </p:cNvSpPr>
+          <p:nvPr>
+            <p:ph type="sldNum" sz="quarter" idx="12"/>
+          </p:nvPr>
+        </p:nvSpPr>
+        <p:spPr/>
+        <p:txBody>
+          <a:bodyPr/>
+          <a:lstStyle/>
+          <a:p>
+            <a:fld id="{E294C9D9-2DEA-415A-A3DF-2372EDC3FB1F}" type="slidenum">
+              <a:rPr lang="ru-RU" smtClean="0"/>
+              <a:t>9</a:t>
+            </a:fld>
+            <a:endParaRPr lang="ru-RU"/>
+          </a:p>
+        </p:txBody>
+      </p:sp>
+      <p:sp>
+        <p:nvSpPr>
+          <p:cNvPr id="7" name="TextBox 6">
+            <a:extLst>
+              <a:ext uri="{FF2B5EF4-FFF2-40B4-BE49-F238E27FC236}">
+                <a16:creationId xmlns:a16="http://schemas.microsoft.com/office/drawing/2014/main" id="{A600E31A-C65A-EBCC-7A8D-831861909A18}"/>
+              </a:ext>
+            </a:extLst>
+          </p:cNvPr>
+          <p:cNvSpPr txBox="1"/>
+          <p:nvPr/>
+        </p:nvSpPr>
+        <p:spPr>
+          <a:xfrm>
+            <a:off x="296179" y="1676700"/>
+            <a:ext cx="11895821" cy="646331"/>
+          </a:xfrm>
+          <a:prstGeom prst="rect">
+            <a:avLst/>
+          </a:prstGeom>
+          <a:noFill/>
+        </p:spPr>
+        <p:txBody>
+          <a:bodyPr wrap="none" rtlCol="0">
+            <a:spAutoFit/>
+          </a:bodyPr>
+          <a:lstStyle/>
+          <a:p>
+            <a:r>
+              <a:rPr lang="ru-RU" dirty="0"/>
+              <a:t>3. Вычисление средней интенсивности: </a:t>
+            </a:r>
+            <a:r>
+              <a:rPr lang="ru-RU" dirty="0" err="1"/>
+              <a:t>mean_intensity</a:t>
+            </a:r>
+            <a:r>
+              <a:rPr lang="ru-RU" dirty="0"/>
+              <a:t> = (</a:t>
+            </a:r>
+            <a:r>
+              <a:rPr lang="ru-RU" dirty="0" err="1"/>
+              <a:t>np.sum</a:t>
+            </a:r>
+            <a:r>
+              <a:rPr lang="ru-RU" dirty="0"/>
+              <a:t>(</a:t>
+            </a:r>
+            <a:r>
+              <a:rPr lang="ru-RU" dirty="0" err="1"/>
+              <a:t>intensity</a:t>
+            </a:r>
+            <a:r>
+              <a:rPr lang="ru-RU" dirty="0"/>
+              <a:t> * </a:t>
+            </a:r>
+            <a:r>
+              <a:rPr lang="ru-RU" dirty="0" err="1"/>
+              <a:t>rgb_hist.flatten</a:t>
+            </a:r>
+            <a:r>
+              <a:rPr lang="ru-RU" dirty="0"/>
+              <a:t>())/ </a:t>
+            </a:r>
+            <a:r>
+              <a:rPr lang="ru-RU" dirty="0" err="1"/>
+              <a:t>np.sum</a:t>
+            </a:r>
+            <a:r>
+              <a:rPr lang="ru-RU" dirty="0"/>
+              <a:t>(</a:t>
+            </a:r>
+            <a:r>
+              <a:rPr lang="ru-RU" dirty="0" err="1"/>
+              <a:t>rgb_hist</a:t>
+            </a:r>
+            <a:r>
+              <a:rPr lang="ru-RU" dirty="0"/>
+              <a:t>))</a:t>
+            </a:r>
+          </a:p>
+          <a:p>
+            <a:r>
+              <a:rPr lang="ru-RU" dirty="0"/>
+              <a:t>4. Определение наиболее насыщенного канала: канал с максимальным значением средней интенсивности</a:t>
+            </a:r>
+            <a:endParaRPr lang="en-US" dirty="0"/>
           </a:p>
         </p:txBody>
       </p:sp>
       <p:pic>
         <p:nvPicPr>
-          <p:cNvPr id="5" name="Рисунок 4">
-            <a:extLst>
-              <a:ext uri="{FF2B5EF4-FFF2-40B4-BE49-F238E27FC236}">
-                <a16:creationId xmlns:a16="http://schemas.microsoft.com/office/drawing/2014/main" id="{A6CC4354-3BC5-4C51-A977-B3A2A8ABBA8F}"/>
+          <p:cNvPr id="4" name="Рисунок 3">
+            <a:extLst>
+              <a:ext uri="{FF2B5EF4-FFF2-40B4-BE49-F238E27FC236}">
+                <a16:creationId xmlns:a16="http://schemas.microsoft.com/office/drawing/2014/main" id="{B87B06F6-68AE-834D-1AE2-346EA631CC9A}"/>
               </a:ext>
             </a:extLst>
           </p:cNvPr>
@@ -11964,47 +12526,18 @@
         </p:blipFill>
         <p:spPr>
           <a:xfrm>
-            <a:off x="1852020" y="1233181"/>
-            <a:ext cx="8487960" cy="4391638"/>
+            <a:off x="1964876" y="2811011"/>
+            <a:ext cx="8262248" cy="1235978"/>
           </a:xfrm>
           <a:prstGeom prst="rect">
             <a:avLst/>
           </a:prstGeom>
         </p:spPr>
       </p:pic>
-      <p:sp>
-        <p:nvSpPr>
-          <p:cNvPr id="7" name="Номер слайда 6">
-            <a:extLst>
-              <a:ext uri="{FF2B5EF4-FFF2-40B4-BE49-F238E27FC236}">
-                <a16:creationId xmlns:a16="http://schemas.microsoft.com/office/drawing/2014/main" id="{EF85A386-2F77-B17E-B110-B0A0786CB42B}"/>
-              </a:ext>
-            </a:extLst>
-          </p:cNvPr>
-          <p:cNvSpPr>
-            <a:spLocks noGrp="1"/>
-          </p:cNvSpPr>
-          <p:nvPr>
-            <p:ph type="sldNum" sz="quarter" idx="12"/>
-          </p:nvPr>
-        </p:nvSpPr>
-        <p:spPr/>
-        <p:txBody>
-          <a:bodyPr/>
-          <a:lstStyle/>
-          <a:p>
-            <a:fld id="{E294C9D9-2DEA-415A-A3DF-2372EDC3FB1F}" type="slidenum">
-              <a:rPr lang="ru-RU" smtClean="0"/>
-              <a:t>9</a:t>
-            </a:fld>
-            <a:endParaRPr lang="ru-RU"/>
-          </a:p>
-        </p:txBody>
-      </p:sp>
     </p:spTree>
     <p:extLst>
       <p:ext uri="{BB962C8B-B14F-4D97-AF65-F5344CB8AC3E}">
-        <p14:creationId xmlns:p14="http://schemas.microsoft.com/office/powerpoint/2010/main" val="3893364793"/>
+        <p14:creationId xmlns:p14="http://schemas.microsoft.com/office/powerpoint/2010/main" val="2977553467"/>
       </p:ext>
     </p:extLst>
   </p:cSld>
